--- a/presentations/start-03-foundation-to-g1/Start_03_Foundation_to_G1_Narrated.pptx
+++ b/presentations/start-03-foundation-to-g1/Start_03_Foundation_to_G1_Narrated.pptx
@@ -167,7 +167,7 @@
     </p:spTree>
     <p:extLst>
       <p:ext uri="{BB962C8B-B14F-4D97-AF65-F5344CB8AC3E}">
-        <p14:creationId xmlns:p14="http://schemas.microsoft.com/office/powerpoint/2010/main" val="3458890045"/>
+        <p14:creationId xmlns:p14="http://schemas.microsoft.com/office/powerpoint/2010/main" val="3811216301"/>
       </p:ext>
     </p:extLst>
   </p:cSld>
@@ -2099,7 +2099,7 @@
             <a:hlinkClick r:id="" action="ppaction://media"/>
             <a:extLst>
               <a:ext uri="{FF2B5EF4-FFF2-40B4-BE49-F238E27FC236}">
-                <a16:creationId xmlns:a16="http://schemas.microsoft.com/office/drawing/2014/main" id="{8C7E514D-DEF2-BE91-31F4-A44A34413E30}"/>
+                <a16:creationId xmlns:a16="http://schemas.microsoft.com/office/drawing/2014/main" id="{5643A74C-62CB-CF56-B200-073443E0FBB1}"/>
               </a:ext>
             </a:extLst>
           </p:cNvPr>
@@ -2115,7 +2115,7 @@
                     <p:ext uri="{3AFAAA56-56D3-431D-BCD4-E75A35582382}">
                       <p173:tracksInfo xmlns:p173="http://schemas.microsoft.com/office/powerpoint/2017/3/main" displayLoc="slide">
                         <p173:trackLst>
-                          <p173:track id="{B9B9D7BA-7214-4A1A-A499-71D3119AB612}" label="English (captions)" lang="en-US" r:embed="rId6"/>
+                          <p173:track id="{844C8C42-5733-4E35-A2E3-00E15615BDE4}" label="English (captions)" lang="en-US" r:embed="rId6"/>
                         </p173:trackLst>
                       </p173:tracksInfo>
                     </p:ext>
@@ -2133,7 +2133,7 @@
         </p:blipFill>
         <p:spPr>
           <a:xfrm>
-            <a:off x="127000" y="6350000"/>
+            <a:off x="12446000" y="127000"/>
             <a:ext cx="304800" cy="304800"/>
           </a:xfrm>
           <a:prstGeom prst="rect">
@@ -2960,7 +2960,7 @@
             <a:hlinkClick r:id="" action="ppaction://media"/>
             <a:extLst>
               <a:ext uri="{FF2B5EF4-FFF2-40B4-BE49-F238E27FC236}">
-                <a16:creationId xmlns:a16="http://schemas.microsoft.com/office/drawing/2014/main" id="{C448A741-7189-FBC2-F235-C87A1E709EE7}"/>
+                <a16:creationId xmlns:a16="http://schemas.microsoft.com/office/drawing/2014/main" id="{5EFB2F6F-C610-C08D-7849-BFC454C90096}"/>
               </a:ext>
             </a:extLst>
           </p:cNvPr>
@@ -2976,7 +2976,7 @@
                     <p:ext uri="{3AFAAA56-56D3-431D-BCD4-E75A35582382}">
                       <p173:tracksInfo xmlns:p173="http://schemas.microsoft.com/office/powerpoint/2017/3/main" displayLoc="slide">
                         <p173:trackLst>
-                          <p173:track id="{5975E0C3-9A81-485D-B86A-427CA174FB69}" label="English (captions)" lang="en-US" r:embed="rId7"/>
+                          <p173:track id="{32673D2E-E44A-4A63-BB87-45D90C6BD423}" label="English (captions)" lang="en-US" r:embed="rId7"/>
                         </p173:trackLst>
                       </p173:tracksInfo>
                     </p:ext>
@@ -2994,7 +2994,7 @@
         </p:blipFill>
         <p:spPr>
           <a:xfrm>
-            <a:off x="127000" y="6350000"/>
+            <a:off x="12446000" y="127000"/>
             <a:ext cx="304800" cy="304800"/>
           </a:xfrm>
           <a:prstGeom prst="rect">
@@ -4211,7 +4211,7 @@
             <a:hlinkClick r:id="" action="ppaction://media"/>
             <a:extLst>
               <a:ext uri="{FF2B5EF4-FFF2-40B4-BE49-F238E27FC236}">
-                <a16:creationId xmlns:a16="http://schemas.microsoft.com/office/drawing/2014/main" id="{C332DB93-63A2-4366-3336-2B3D3C942525}"/>
+                <a16:creationId xmlns:a16="http://schemas.microsoft.com/office/drawing/2014/main" id="{2C4C13D8-B271-8B8D-2BE1-384738097708}"/>
               </a:ext>
             </a:extLst>
           </p:cNvPr>
@@ -4227,7 +4227,7 @@
                     <p:ext uri="{3AFAAA56-56D3-431D-BCD4-E75A35582382}">
                       <p173:tracksInfo xmlns:p173="http://schemas.microsoft.com/office/powerpoint/2017/3/main" displayLoc="slide">
                         <p173:trackLst>
-                          <p173:track id="{FB43B566-0670-4EED-90C8-89C48743A3C9}" label="English (captions)" lang="en-US" r:embed="rId8"/>
+                          <p173:track id="{067B9543-EF48-4689-994F-4D1DF548293F}" label="English (captions)" lang="en-US" r:embed="rId8"/>
                         </p173:trackLst>
                       </p173:tracksInfo>
                     </p:ext>
@@ -4245,7 +4245,7 @@
         </p:blipFill>
         <p:spPr>
           <a:xfrm>
-            <a:off x="127000" y="6350000"/>
+            <a:off x="12446000" y="127000"/>
             <a:ext cx="304800" cy="304800"/>
           </a:xfrm>
           <a:prstGeom prst="rect">
@@ -4891,7 +4891,7 @@
             <a:hlinkClick r:id="" action="ppaction://media"/>
             <a:extLst>
               <a:ext uri="{FF2B5EF4-FFF2-40B4-BE49-F238E27FC236}">
-                <a16:creationId xmlns:a16="http://schemas.microsoft.com/office/drawing/2014/main" id="{3C35A192-8FC2-D80B-D07C-C4CDFDFC0424}"/>
+                <a16:creationId xmlns:a16="http://schemas.microsoft.com/office/drawing/2014/main" id="{F1C65863-0F0A-60E7-6DB7-F36C2F1AA72F}"/>
               </a:ext>
             </a:extLst>
           </p:cNvPr>
@@ -4907,7 +4907,7 @@
                     <p:ext uri="{3AFAAA56-56D3-431D-BCD4-E75A35582382}">
                       <p173:tracksInfo xmlns:p173="http://schemas.microsoft.com/office/powerpoint/2017/3/main" displayLoc="slide">
                         <p173:trackLst>
-                          <p173:track id="{0788ACDA-543B-4848-A012-3D4E33529B8D}" label="English (captions)" lang="en-US" r:embed="rId8"/>
+                          <p173:track id="{90CCE50E-47B4-40E2-80FE-F69B06516EFB}" label="English (captions)" lang="en-US" r:embed="rId8"/>
                         </p173:trackLst>
                       </p173:tracksInfo>
                     </p:ext>
@@ -4925,7 +4925,7 @@
         </p:blipFill>
         <p:spPr>
           <a:xfrm>
-            <a:off x="127000" y="6350000"/>
+            <a:off x="12446000" y="127000"/>
             <a:ext cx="304800" cy="304800"/>
           </a:xfrm>
           <a:prstGeom prst="rect">
@@ -6479,7 +6479,7 @@
             <a:hlinkClick r:id="" action="ppaction://media"/>
             <a:extLst>
               <a:ext uri="{FF2B5EF4-FFF2-40B4-BE49-F238E27FC236}">
-                <a16:creationId xmlns:a16="http://schemas.microsoft.com/office/drawing/2014/main" id="{40FACB04-B1A5-D8F0-1F35-86771E9C5EA4}"/>
+                <a16:creationId xmlns:a16="http://schemas.microsoft.com/office/drawing/2014/main" id="{5121ABA9-019F-18D4-CF22-768949256EDC}"/>
               </a:ext>
             </a:extLst>
           </p:cNvPr>
@@ -6495,7 +6495,7 @@
                     <p:ext uri="{3AFAAA56-56D3-431D-BCD4-E75A35582382}">
                       <p173:tracksInfo xmlns:p173="http://schemas.microsoft.com/office/powerpoint/2017/3/main" displayLoc="slide">
                         <p173:trackLst>
-                          <p173:track id="{109ADBE4-B32B-4B6C-B0D8-8DE21BCB0A0B}" label="English (captions)" lang="en-US" r:embed="rId6"/>
+                          <p173:track id="{EB3E8F13-AB8E-4BFC-8809-918C400C93E6}" label="English (captions)" lang="en-US" r:embed="rId6"/>
                         </p173:trackLst>
                       </p173:tracksInfo>
                     </p:ext>
@@ -6513,7 +6513,7 @@
         </p:blipFill>
         <p:spPr>
           <a:xfrm>
-            <a:off x="127000" y="6350000"/>
+            <a:off x="12446000" y="127000"/>
             <a:ext cx="304800" cy="304800"/>
           </a:xfrm>
           <a:prstGeom prst="rect">
@@ -7358,7 +7358,7 @@
             <a:hlinkClick r:id="" action="ppaction://media"/>
             <a:extLst>
               <a:ext uri="{FF2B5EF4-FFF2-40B4-BE49-F238E27FC236}">
-                <a16:creationId xmlns:a16="http://schemas.microsoft.com/office/drawing/2014/main" id="{C3467ABF-280C-A391-7563-DA5A4ECF42F8}"/>
+                <a16:creationId xmlns:a16="http://schemas.microsoft.com/office/drawing/2014/main" id="{14B18901-E274-4802-EE4A-BE80DC614197}"/>
               </a:ext>
             </a:extLst>
           </p:cNvPr>
@@ -7374,7 +7374,7 @@
                     <p:ext uri="{3AFAAA56-56D3-431D-BCD4-E75A35582382}">
                       <p173:tracksInfo xmlns:p173="http://schemas.microsoft.com/office/powerpoint/2017/3/main" displayLoc="slide">
                         <p173:trackLst>
-                          <p173:track id="{ED85E0EF-C717-41ED-8278-2E6D370B2BD5}" label="English (captions)" lang="en-US" r:embed="rId7"/>
+                          <p173:track id="{E5A09EC3-4447-4BB4-85D5-395A4DF7EE86}" label="English (captions)" lang="en-US" r:embed="rId7"/>
                         </p173:trackLst>
                       </p173:tracksInfo>
                     </p:ext>
@@ -7392,7 +7392,7 @@
         </p:blipFill>
         <p:spPr>
           <a:xfrm>
-            <a:off x="127000" y="6350000"/>
+            <a:off x="12446000" y="127000"/>
             <a:ext cx="304800" cy="304800"/>
           </a:xfrm>
           <a:prstGeom prst="rect">
@@ -8479,7 +8479,7 @@
             <a:hlinkClick r:id="" action="ppaction://media"/>
             <a:extLst>
               <a:ext uri="{FF2B5EF4-FFF2-40B4-BE49-F238E27FC236}">
-                <a16:creationId xmlns:a16="http://schemas.microsoft.com/office/drawing/2014/main" id="{A43FFE47-82F1-4034-0321-B5B15EA6F105}"/>
+                <a16:creationId xmlns:a16="http://schemas.microsoft.com/office/drawing/2014/main" id="{2DEADFA6-0A74-EEF0-F14E-E23E6DF71470}"/>
               </a:ext>
             </a:extLst>
           </p:cNvPr>
@@ -8495,7 +8495,7 @@
                     <p:ext uri="{3AFAAA56-56D3-431D-BCD4-E75A35582382}">
                       <p173:tracksInfo xmlns:p173="http://schemas.microsoft.com/office/powerpoint/2017/3/main" displayLoc="slide">
                         <p173:trackLst>
-                          <p173:track id="{196EDEAC-40BB-48CD-95F4-B4A12FAE383B}" label="English (captions)" lang="en-US" r:embed="rId8"/>
+                          <p173:track id="{EDD8C194-5320-4EC1-97A0-115DE242597D}" label="English (captions)" lang="en-US" r:embed="rId8"/>
                         </p173:trackLst>
                       </p173:tracksInfo>
                     </p:ext>
@@ -8513,7 +8513,7 @@
         </p:blipFill>
         <p:spPr>
           <a:xfrm>
-            <a:off x="127000" y="6350000"/>
+            <a:off x="12446000" y="127000"/>
             <a:ext cx="304800" cy="304800"/>
           </a:xfrm>
           <a:prstGeom prst="rect">
@@ -9322,7 +9322,7 @@
             <a:hlinkClick r:id="" action="ppaction://media"/>
             <a:extLst>
               <a:ext uri="{FF2B5EF4-FFF2-40B4-BE49-F238E27FC236}">
-                <a16:creationId xmlns:a16="http://schemas.microsoft.com/office/drawing/2014/main" id="{20F989F5-EC8F-9BAC-95A3-64D8B8B3F410}"/>
+                <a16:creationId xmlns:a16="http://schemas.microsoft.com/office/drawing/2014/main" id="{D129E188-9BD2-ACA3-5995-33FCDEEC0961}"/>
               </a:ext>
             </a:extLst>
           </p:cNvPr>
@@ -9338,7 +9338,7 @@
                     <p:ext uri="{3AFAAA56-56D3-431D-BCD4-E75A35582382}">
                       <p173:tracksInfo xmlns:p173="http://schemas.microsoft.com/office/powerpoint/2017/3/main" displayLoc="slide">
                         <p173:trackLst>
-                          <p173:track id="{FA36F430-60BE-4682-8B90-349D6BFC6FE7}" label="English (captions)" lang="en-US" r:embed="rId7"/>
+                          <p173:track id="{71CABE5D-C2B9-4884-9DD5-8A00EF80E12A}" label="English (captions)" lang="en-US" r:embed="rId7"/>
                         </p173:trackLst>
                       </p173:tracksInfo>
                     </p:ext>
@@ -9356,7 +9356,7 @@
         </p:blipFill>
         <p:spPr>
           <a:xfrm>
-            <a:off x="127000" y="6350000"/>
+            <a:off x="12446000" y="127000"/>
             <a:ext cx="304800" cy="304800"/>
           </a:xfrm>
           <a:prstGeom prst="rect">
@@ -10995,7 +10995,7 @@
             <a:hlinkClick r:id="" action="ppaction://media"/>
             <a:extLst>
               <a:ext uri="{FF2B5EF4-FFF2-40B4-BE49-F238E27FC236}">
-                <a16:creationId xmlns:a16="http://schemas.microsoft.com/office/drawing/2014/main" id="{EF02FB3D-1787-ED00-DCD8-F21206D80F96}"/>
+                <a16:creationId xmlns:a16="http://schemas.microsoft.com/office/drawing/2014/main" id="{AFF6E16A-0BBD-47DC-0D6B-3D0E81E1144F}"/>
               </a:ext>
             </a:extLst>
           </p:cNvPr>
@@ -11011,7 +11011,7 @@
                     <p:ext uri="{3AFAAA56-56D3-431D-BCD4-E75A35582382}">
                       <p173:tracksInfo xmlns:p173="http://schemas.microsoft.com/office/powerpoint/2017/3/main" displayLoc="slide">
                         <p173:trackLst>
-                          <p173:track id="{9192B198-743E-41B6-ACAB-8491557BE734}" label="English (captions)" lang="en-US" r:embed="rId7"/>
+                          <p173:track id="{FFDA33A9-8FA9-4F2A-B6FF-0BFCF8E23118}" label="English (captions)" lang="en-US" r:embed="rId7"/>
                         </p173:trackLst>
                       </p173:tracksInfo>
                     </p:ext>
@@ -11029,7 +11029,7 @@
         </p:blipFill>
         <p:spPr>
           <a:xfrm>
-            <a:off x="127000" y="6350000"/>
+            <a:off x="12446000" y="127000"/>
             <a:ext cx="304800" cy="304800"/>
           </a:xfrm>
           <a:prstGeom prst="rect">
@@ -12668,7 +12668,7 @@
             <a:hlinkClick r:id="" action="ppaction://media"/>
             <a:extLst>
               <a:ext uri="{FF2B5EF4-FFF2-40B4-BE49-F238E27FC236}">
-                <a16:creationId xmlns:a16="http://schemas.microsoft.com/office/drawing/2014/main" id="{B431EDA5-1EF1-0911-4B52-F3E9D32A8EAC}"/>
+                <a16:creationId xmlns:a16="http://schemas.microsoft.com/office/drawing/2014/main" id="{F3C708E6-194B-8192-CBF7-EBF056D564BE}"/>
               </a:ext>
             </a:extLst>
           </p:cNvPr>
@@ -12684,7 +12684,7 @@
                     <p:ext uri="{3AFAAA56-56D3-431D-BCD4-E75A35582382}">
                       <p173:tracksInfo xmlns:p173="http://schemas.microsoft.com/office/powerpoint/2017/3/main" displayLoc="slide">
                         <p173:trackLst>
-                          <p173:track id="{7C45E0E2-3326-429D-8FA8-B27A8FB027D2}" label="English (captions)" lang="en-US" r:embed="rId7"/>
+                          <p173:track id="{2D1A88D7-1EF3-472B-80E8-C09F820DC150}" label="English (captions)" lang="en-US" r:embed="rId7"/>
                         </p173:trackLst>
                       </p173:tracksInfo>
                     </p:ext>
@@ -12702,7 +12702,7 @@
         </p:blipFill>
         <p:spPr>
           <a:xfrm>
-            <a:off x="127000" y="6350000"/>
+            <a:off x="12446000" y="127000"/>
             <a:ext cx="304800" cy="304800"/>
           </a:xfrm>
           <a:prstGeom prst="rect">
